--- a/public/fun/cards/creative/creative-35.pptx
+++ b/public/fun/cards/creative/creative-35.pptx
@@ -3085,7 +3085,7 @@
     <p:bg>
       <p:bgPr>
         <a:solidFill>
-          <a:srgbClr val="2F481E"/>
+          <a:srgbClr val="0E1116"/>
         </a:solidFill>
         <a:effectLst/>
       </p:bgPr>
@@ -3099,49 +3099,41 @@
       <p:grpSpPr/>
       <p:sp>
         <p:nvSpPr>
-          <p:cNvPr id="2" name="Oval 1"/>
+          <p:cNvPr id="2" name="Freeform 1"/>
           <p:cNvSpPr/>
           <p:nvPr/>
         </p:nvSpPr>
         <p:spPr>
           <a:xfrm>
-            <a:off x="187200" y="403200"/>
-            <a:ext cx="993600" cy="993600"/>
+            <a:off x="2016000" y="0"/>
+            <a:ext cx="1224000" cy="1800000"/>
           </a:xfrm>
-          <a:prstGeom prst="ellipse">
+          <a:custGeom>
             <a:avLst/>
-          </a:prstGeom>
-          <a:noFill/>
-          <a:ln w="14400">
-            <a:solidFill>
-              <a:srgbClr val="506542"/>
-            </a:solidFill>
-          </a:ln>
-        </p:spPr>
-        <p:txBody>
-          <a:bodyPr rtlCol="0" anchor="ctr"/>
-          <a:lstStyle/>
-          <a:p>
-            <a:pPr algn="ctr"/>
-          </a:p>
-        </p:txBody>
-      </p:sp>
-      <p:sp>
-        <p:nvSpPr>
-          <p:cNvPr id="3" name="Oval 2"/>
-          <p:cNvSpPr/>
-          <p:nvPr/>
-        </p:nvSpPr>
-        <p:spPr>
-          <a:xfrm>
-            <a:off x="259200" y="475200"/>
-            <a:ext cx="849600" cy="849600"/>
-          </a:xfrm>
-          <a:prstGeom prst="ellipse">
-            <a:avLst/>
-          </a:prstGeom>
+            <a:gdLst/>
+            <a:ahLst/>
+            <a:cxnLst/>
+            <a:rect l="l" t="t" r="r" b="b"/>
+            <a:pathLst>
+              <a:path w="1224000" h="1800000">
+                <a:moveTo>
+                  <a:pt x="360000" y="0"/>
+                </a:moveTo>
+                <a:lnTo>
+                  <a:pt x="1224000" y="0"/>
+                </a:lnTo>
+                <a:lnTo>
+                  <a:pt x="1224000" y="1800000"/>
+                </a:lnTo>
+                <a:lnTo>
+                  <a:pt x="0" y="1800000"/>
+                </a:lnTo>
+                <a:close/>
+              </a:path>
+            </a:pathLst>
+          </a:custGeom>
           <a:solidFill>
-            <a:srgbClr val="8CB072"/>
+            <a:srgbClr val="00B8E6"/>
           </a:solidFill>
           <a:ln>
             <a:noFill/>
@@ -3157,14 +3149,64 @@
       </p:sp>
       <p:sp>
         <p:nvSpPr>
+          <p:cNvPr id="3" name="Freeform 2"/>
+          <p:cNvSpPr/>
+          <p:nvPr/>
+        </p:nvSpPr>
+        <p:spPr>
+          <a:xfrm>
+            <a:off x="1864800" y="0"/>
+            <a:ext cx="460800" cy="1800000"/>
+          </a:xfrm>
+          <a:custGeom>
+            <a:avLst/>
+            <a:gdLst/>
+            <a:ahLst/>
+            <a:cxnLst/>
+            <a:rect l="l" t="t" r="r" b="b"/>
+            <a:pathLst>
+              <a:path w="460800" h="1800000">
+                <a:moveTo>
+                  <a:pt x="360000" y="0"/>
+                </a:moveTo>
+                <a:lnTo>
+                  <a:pt x="460800" y="0"/>
+                </a:lnTo>
+                <a:lnTo>
+                  <a:pt x="100800" y="1800000"/>
+                </a:lnTo>
+                <a:lnTo>
+                  <a:pt x="0" y="1800000"/>
+                </a:lnTo>
+                <a:close/>
+              </a:path>
+            </a:pathLst>
+          </a:custGeom>
+          <a:solidFill>
+            <a:srgbClr val="26292D"/>
+          </a:solidFill>
+          <a:ln>
+            <a:noFill/>
+          </a:ln>
+        </p:spPr>
+        <p:txBody>
+          <a:bodyPr rtlCol="0" anchor="ctr"/>
+          <a:lstStyle/>
+          <a:p>
+            <a:pPr algn="ctr"/>
+          </a:p>
+        </p:txBody>
+      </p:sp>
+      <p:sp>
+        <p:nvSpPr>
           <p:cNvPr id="4" name="텍스트"/>
           <p:cNvSpPr txBox="1"/>
           <p:nvPr/>
         </p:nvSpPr>
         <p:spPr>
           <a:xfrm>
-            <a:off x="259200" y="612000"/>
-            <a:ext cx="849600" cy="576000"/>
+            <a:off x="252000" y="223200"/>
+            <a:ext cx="1440000" cy="133351"/>
           </a:xfrm>
           <a:prstGeom prst="rect">
             <a:avLst/>
@@ -3172,25 +3214,25 @@
           <a:noFill/>
         </p:spPr>
         <p:txBody>
-          <a:bodyPr wrap="square" lIns="0" rIns="0" tIns="0" bIns="0" anchor="ctr">
+          <a:bodyPr wrap="square" lIns="0" rIns="0" tIns="0" bIns="0" anchor="t">
             <a:spAutoFit/>
           </a:bodyPr>
           <a:lstStyle/>
           <a:p>
-            <a:pPr algn="ctr">
+            <a:pPr algn="l">
               <a:lnSpc>
-                <a:spcPts val="6959"/>
+                <a:spcPts val="1015"/>
               </a:lnSpc>
             </a:pPr>
             <a:r>
-              <a:rPr sz="4800" b="1">
+              <a:rPr sz="700" b="1" spc="200">
                 <a:solidFill>
-                  <a:srgbClr val="FFFFFF"/>
+                  <a:srgbClr val="A3A9B5"/>
                 </a:solidFill>
                 <a:latin typeface="맑은 고딕"/>
                 <a:ea typeface="맑은 고딕"/>
               </a:rPr>
-              <a:t>탁</a:t>
+              <a:t>스튜디오 이름</a:t>
             </a:r>
           </a:p>
         </p:txBody>
@@ -3203,8 +3245,8 @@
         </p:nvSpPr>
         <p:spPr>
           <a:xfrm>
-            <a:off x="1332000" y="223200"/>
-            <a:ext cx="1728000" cy="100800"/>
+            <a:off x="252000" y="540000"/>
+            <a:ext cx="1584000" cy="360000"/>
           </a:xfrm>
           <a:prstGeom prst="rect">
             <a:avLst/>
@@ -3219,51 +3261,11 @@
           <a:p>
             <a:pPr algn="l">
               <a:lnSpc>
-                <a:spcPts val="1087"/>
+                <a:spcPts val="3190"/>
               </a:lnSpc>
             </a:pPr>
             <a:r>
-              <a:rPr sz="750" b="1" spc="150">
-                <a:solidFill>
-                  <a:srgbClr val="B6BFB0"/>
-                </a:solidFill>
-                <a:latin typeface="맑은 고딕"/>
-                <a:ea typeface="맑은 고딕"/>
-              </a:rPr>
-              <a:t>스튜디오 이름</a:t>
-            </a:r>
-          </a:p>
-        </p:txBody>
-      </p:sp>
-      <p:sp>
-        <p:nvSpPr>
-          <p:cNvPr id="6" name="텍스트"/>
-          <p:cNvSpPr txBox="1"/>
-          <p:nvPr/>
-        </p:nvSpPr>
-        <p:spPr>
-          <a:xfrm>
-            <a:off x="1332000" y="424800"/>
-            <a:ext cx="1728000" cy="297182"/>
-          </a:xfrm>
-          <a:prstGeom prst="rect">
-            <a:avLst/>
-          </a:prstGeom>
-          <a:noFill/>
-        </p:spPr>
-        <p:txBody>
-          <a:bodyPr wrap="square" lIns="0" rIns="0" tIns="0" bIns="0" anchor="t">
-            <a:spAutoFit/>
-          </a:bodyPr>
-          <a:lstStyle/>
-          <a:p>
-            <a:pPr algn="l">
-              <a:lnSpc>
-                <a:spcPts val="2610"/>
-              </a:lnSpc>
-            </a:pPr>
-            <a:r>
-              <a:rPr sz="1800" b="1" spc="50">
+              <a:rPr sz="2200" b="1">
                 <a:solidFill>
                   <a:srgbClr val="FFFFFF"/>
                 </a:solidFill>
@@ -3277,14 +3279,14 @@
       </p:sp>
       <p:sp>
         <p:nvSpPr>
-          <p:cNvPr id="7" name="텍스트"/>
+          <p:cNvPr id="6" name="텍스트"/>
           <p:cNvSpPr txBox="1"/>
           <p:nvPr/>
         </p:nvSpPr>
         <p:spPr>
           <a:xfrm>
-            <a:off x="1332000" y="705600"/>
-            <a:ext cx="1728000" cy="122400"/>
+            <a:off x="252000" y="943200"/>
+            <a:ext cx="1584000" cy="171451"/>
           </a:xfrm>
           <a:prstGeom prst="rect">
             <a:avLst/>
@@ -3299,13 +3301,13 @@
           <a:p>
             <a:pPr algn="l">
               <a:lnSpc>
-                <a:spcPts val="1232"/>
+                <a:spcPts val="1305"/>
               </a:lnSpc>
             </a:pPr>
             <a:r>
-              <a:rPr sz="850" b="1">
+              <a:rPr sz="900" b="0">
                 <a:solidFill>
-                  <a:srgbClr val="98B880"/>
+                  <a:srgbClr val="A3A9B5"/>
                 </a:solidFill>
                 <a:latin typeface="맑은 고딕"/>
                 <a:ea typeface="맑은 고딕"/>
@@ -3317,20 +3319,20 @@
       </p:sp>
       <p:sp>
         <p:nvSpPr>
-          <p:cNvPr id="8" name="Rectangle 7"/>
+          <p:cNvPr id="7" name="Rectangle 6"/>
           <p:cNvSpPr/>
           <p:nvPr/>
         </p:nvSpPr>
         <p:spPr>
           <a:xfrm>
-            <a:off x="1332000" y="907200"/>
-            <a:ext cx="201600" cy="14400"/>
+            <a:off x="252000" y="1195200"/>
+            <a:ext cx="144000" cy="18000"/>
           </a:xfrm>
           <a:prstGeom prst="rect">
             <a:avLst/>
           </a:prstGeom>
           <a:solidFill>
-            <a:srgbClr val="8CB072"/>
+            <a:srgbClr val="00B8E6"/>
           </a:solidFill>
           <a:ln>
             <a:noFill/>
@@ -3346,14 +3348,14 @@
       </p:sp>
       <p:sp>
         <p:nvSpPr>
-          <p:cNvPr id="9" name="텍스트"/>
+          <p:cNvPr id="8" name="텍스트"/>
           <p:cNvSpPr txBox="1"/>
           <p:nvPr/>
         </p:nvSpPr>
         <p:spPr>
           <a:xfrm>
-            <a:off x="1332000" y="1051200"/>
-            <a:ext cx="122400" cy="168911"/>
+            <a:off x="252000" y="1328400"/>
+            <a:ext cx="331200" cy="99061"/>
           </a:xfrm>
           <a:prstGeom prst="rect">
             <a:avLst/>
@@ -3368,32 +3370,32 @@
           <a:p>
             <a:pPr algn="l">
               <a:lnSpc>
-                <a:spcPts val="1015"/>
+                <a:spcPts val="754"/>
               </a:lnSpc>
             </a:pPr>
             <a:r>
-              <a:rPr sz="700" b="1">
+              <a:rPr sz="520" b="1" spc="120">
                 <a:solidFill>
-                  <a:srgbClr val="98B880"/>
+                  <a:srgbClr val="A3A9B5"/>
                 </a:solidFill>
                 <a:latin typeface="맑은 고딕"/>
                 <a:ea typeface="맑은 고딕"/>
               </a:rPr>
-              <a:t>T</a:t>
-            </a:r>
-          </a:p>
-        </p:txBody>
-      </p:sp>
-      <p:sp>
-        <p:nvSpPr>
-          <p:cNvPr id="10" name="텍스트"/>
+              <a:t>TEL</a:t>
+            </a:r>
+          </a:p>
+        </p:txBody>
+      </p:sp>
+      <p:sp>
+        <p:nvSpPr>
+          <p:cNvPr id="9" name="텍스트"/>
           <p:cNvSpPr txBox="1"/>
           <p:nvPr/>
         </p:nvSpPr>
         <p:spPr>
           <a:xfrm>
-            <a:off x="1476000" y="1051200"/>
-            <a:ext cx="1584000" cy="168911"/>
+            <a:off x="583200" y="1317600"/>
+            <a:ext cx="1188000" cy="125731"/>
           </a:xfrm>
           <a:prstGeom prst="rect">
             <a:avLst/>
@@ -3408,11 +3410,11 @@
           <a:p>
             <a:pPr algn="l">
               <a:lnSpc>
-                <a:spcPts val="1015"/>
+                <a:spcPts val="956"/>
               </a:lnSpc>
             </a:pPr>
             <a:r>
-              <a:rPr sz="700" b="0">
+              <a:rPr sz="660" b="0">
                 <a:solidFill>
                   <a:srgbClr val="FFFFFF"/>
                 </a:solidFill>
@@ -3426,14 +3428,14 @@
       </p:sp>
       <p:sp>
         <p:nvSpPr>
-          <p:cNvPr id="11" name="텍스트"/>
+          <p:cNvPr id="10" name="텍스트"/>
           <p:cNvSpPr txBox="1"/>
           <p:nvPr/>
         </p:nvSpPr>
         <p:spPr>
           <a:xfrm>
-            <a:off x="1332000" y="1220111"/>
-            <a:ext cx="122400" cy="168911"/>
+            <a:off x="252000" y="1458000"/>
+            <a:ext cx="331200" cy="99061"/>
           </a:xfrm>
           <a:prstGeom prst="rect">
             <a:avLst/>
@@ -3448,32 +3450,32 @@
           <a:p>
             <a:pPr algn="l">
               <a:lnSpc>
-                <a:spcPts val="1015"/>
+                <a:spcPts val="754"/>
               </a:lnSpc>
             </a:pPr>
             <a:r>
-              <a:rPr sz="700" b="1">
+              <a:rPr sz="520" b="1" spc="120">
                 <a:solidFill>
-                  <a:srgbClr val="98B880"/>
+                  <a:srgbClr val="A3A9B5"/>
                 </a:solidFill>
                 <a:latin typeface="맑은 고딕"/>
                 <a:ea typeface="맑은 고딕"/>
               </a:rPr>
-              <a:t>E</a:t>
-            </a:r>
-          </a:p>
-        </p:txBody>
-      </p:sp>
-      <p:sp>
-        <p:nvSpPr>
-          <p:cNvPr id="12" name="텍스트"/>
+              <a:t>MAIL</a:t>
+            </a:r>
+          </a:p>
+        </p:txBody>
+      </p:sp>
+      <p:sp>
+        <p:nvSpPr>
+          <p:cNvPr id="11" name="텍스트"/>
           <p:cNvSpPr txBox="1"/>
           <p:nvPr/>
         </p:nvSpPr>
         <p:spPr>
           <a:xfrm>
-            <a:off x="1476000" y="1220111"/>
-            <a:ext cx="1584000" cy="168911"/>
+            <a:off x="583200" y="1447200"/>
+            <a:ext cx="1188000" cy="125731"/>
           </a:xfrm>
           <a:prstGeom prst="rect">
             <a:avLst/>
@@ -3488,11 +3490,11 @@
           <a:p>
             <a:pPr algn="l">
               <a:lnSpc>
-                <a:spcPts val="1015"/>
+                <a:spcPts val="956"/>
               </a:lnSpc>
             </a:pPr>
             <a:r>
-              <a:rPr sz="700" b="0">
+              <a:rPr sz="660" b="0">
                 <a:solidFill>
                   <a:srgbClr val="FFFFFF"/>
                 </a:solidFill>
@@ -3506,14 +3508,14 @@
       </p:sp>
       <p:sp>
         <p:nvSpPr>
-          <p:cNvPr id="13" name="텍스트"/>
+          <p:cNvPr id="12" name="텍스트"/>
           <p:cNvSpPr txBox="1"/>
           <p:nvPr/>
         </p:nvSpPr>
         <p:spPr>
           <a:xfrm>
-            <a:off x="1332000" y="1389022"/>
-            <a:ext cx="122400" cy="168911"/>
+            <a:off x="252000" y="1587600"/>
+            <a:ext cx="331200" cy="99061"/>
           </a:xfrm>
           <a:prstGeom prst="rect">
             <a:avLst/>
@@ -3528,32 +3530,32 @@
           <a:p>
             <a:pPr algn="l">
               <a:lnSpc>
-                <a:spcPts val="1015"/>
+                <a:spcPts val="754"/>
               </a:lnSpc>
             </a:pPr>
             <a:r>
-              <a:rPr sz="700" b="1">
+              <a:rPr sz="520" b="1" spc="120">
                 <a:solidFill>
-                  <a:srgbClr val="98B880"/>
+                  <a:srgbClr val="A3A9B5"/>
                 </a:solidFill>
                 <a:latin typeface="맑은 고딕"/>
                 <a:ea typeface="맑은 고딕"/>
               </a:rPr>
-              <a:t>A</a:t>
-            </a:r>
-          </a:p>
-        </p:txBody>
-      </p:sp>
-      <p:sp>
-        <p:nvSpPr>
-          <p:cNvPr id="14" name="텍스트"/>
+              <a:t>ADDR</a:t>
+            </a:r>
+          </a:p>
+        </p:txBody>
+      </p:sp>
+      <p:sp>
+        <p:nvSpPr>
+          <p:cNvPr id="13" name="텍스트"/>
           <p:cNvSpPr txBox="1"/>
           <p:nvPr/>
         </p:nvSpPr>
         <p:spPr>
           <a:xfrm>
-            <a:off x="1476000" y="1389022"/>
-            <a:ext cx="1584000" cy="168911"/>
+            <a:off x="583200" y="1576800"/>
+            <a:ext cx="1188000" cy="125731"/>
           </a:xfrm>
           <a:prstGeom prst="rect">
             <a:avLst/>
@@ -3568,11 +3570,11 @@
           <a:p>
             <a:pPr algn="l">
               <a:lnSpc>
-                <a:spcPts val="1015"/>
+                <a:spcPts val="956"/>
               </a:lnSpc>
             </a:pPr>
             <a:r>
-              <a:rPr sz="700" b="0">
+              <a:rPr sz="660" b="0">
                 <a:solidFill>
                   <a:srgbClr val="FFFFFF"/>
                 </a:solidFill>
@@ -3598,7 +3600,7 @@
     <p:bg>
       <p:bgPr>
         <a:solidFill>
-          <a:srgbClr val="49702E"/>
+          <a:srgbClr val="0E1116"/>
         </a:solidFill>
         <a:effectLst/>
       </p:bgPr>
@@ -3612,277 +3614,14 @@
       <p:grpSpPr/>
       <p:sp>
         <p:nvSpPr>
-          <p:cNvPr id="2" name="Freeform 1"/>
-          <p:cNvSpPr/>
+          <p:cNvPr id="2" name="텍스트"/>
+          <p:cNvSpPr txBox="1"/>
           <p:nvPr/>
         </p:nvSpPr>
         <p:spPr>
           <a:xfrm>
-            <a:off x="2016000" y="576000"/>
-            <a:ext cx="1224000" cy="1224000"/>
-          </a:xfrm>
-          <a:custGeom>
-            <a:avLst/>
-            <a:gdLst/>
-            <a:ahLst/>
-            <a:cxnLst/>
-            <a:rect l="l" t="t" r="r" b="b"/>
-            <a:pathLst>
-              <a:path w="1224000" h="1224000">
-                <a:moveTo>
-                  <a:pt x="1224000" y="1224000"/>
-                </a:moveTo>
-                <a:lnTo>
-                  <a:pt x="0" y="1224000"/>
-                </a:lnTo>
-                <a:lnTo>
-                  <a:pt x="7696" y="1086955"/>
-                </a:lnTo>
-                <a:lnTo>
-                  <a:pt x="30688" y="951634"/>
-                </a:lnTo>
-                <a:lnTo>
-                  <a:pt x="68687" y="819738"/>
-                </a:lnTo>
-                <a:lnTo>
-                  <a:pt x="121214" y="692926"/>
-                </a:lnTo>
-                <a:lnTo>
-                  <a:pt x="187610" y="572793"/>
-                </a:lnTo>
-                <a:lnTo>
-                  <a:pt x="267038" y="460848"/>
-                </a:lnTo>
-                <a:lnTo>
-                  <a:pt x="358501" y="358501"/>
-                </a:lnTo>
-                <a:lnTo>
-                  <a:pt x="460848" y="267038"/>
-                </a:lnTo>
-                <a:lnTo>
-                  <a:pt x="572793" y="187610"/>
-                </a:lnTo>
-                <a:lnTo>
-                  <a:pt x="692926" y="121214"/>
-                </a:lnTo>
-                <a:lnTo>
-                  <a:pt x="819738" y="68687"/>
-                </a:lnTo>
-                <a:lnTo>
-                  <a:pt x="951634" y="30688"/>
-                </a:lnTo>
-                <a:lnTo>
-                  <a:pt x="1086955" y="7696"/>
-                </a:lnTo>
-                <a:lnTo>
-                  <a:pt x="1224000" y="0"/>
-                </a:lnTo>
-                <a:close/>
-              </a:path>
-            </a:pathLst>
-          </a:custGeom>
-          <a:solidFill>
-            <a:srgbClr val="DEEFD2"/>
-          </a:solidFill>
-          <a:ln>
-            <a:noFill/>
-          </a:ln>
-        </p:spPr>
-        <p:txBody>
-          <a:bodyPr rtlCol="0" anchor="ctr"/>
-          <a:lstStyle/>
-          <a:p>
-            <a:pPr algn="ctr"/>
-          </a:p>
-        </p:txBody>
-      </p:sp>
-      <p:sp>
-        <p:nvSpPr>
-          <p:cNvPr id="3" name="Freeform 2"/>
-          <p:cNvSpPr/>
-          <p:nvPr/>
-        </p:nvSpPr>
-        <p:spPr>
-          <a:xfrm>
-            <a:off x="2520000" y="1080000"/>
-            <a:ext cx="720000" cy="720000"/>
-          </a:xfrm>
-          <a:custGeom>
-            <a:avLst/>
-            <a:gdLst/>
-            <a:ahLst/>
-            <a:cxnLst/>
-            <a:rect l="l" t="t" r="r" b="b"/>
-            <a:pathLst>
-              <a:path w="720000" h="720000">
-                <a:moveTo>
-                  <a:pt x="720000" y="720000"/>
-                </a:moveTo>
-                <a:lnTo>
-                  <a:pt x="0" y="720000"/>
-                </a:lnTo>
-                <a:lnTo>
-                  <a:pt x="4527" y="639386"/>
-                </a:lnTo>
-                <a:lnTo>
-                  <a:pt x="18052" y="559785"/>
-                </a:lnTo>
-                <a:lnTo>
-                  <a:pt x="40404" y="482199"/>
-                </a:lnTo>
-                <a:lnTo>
-                  <a:pt x="71302" y="407604"/>
-                </a:lnTo>
-                <a:lnTo>
-                  <a:pt x="110359" y="336937"/>
-                </a:lnTo>
-                <a:lnTo>
-                  <a:pt x="157081" y="271087"/>
-                </a:lnTo>
-                <a:lnTo>
-                  <a:pt x="210883" y="210883"/>
-                </a:lnTo>
-                <a:lnTo>
-                  <a:pt x="271087" y="157081"/>
-                </a:lnTo>
-                <a:lnTo>
-                  <a:pt x="336937" y="110359"/>
-                </a:lnTo>
-                <a:lnTo>
-                  <a:pt x="407604" y="71302"/>
-                </a:lnTo>
-                <a:lnTo>
-                  <a:pt x="482199" y="40404"/>
-                </a:lnTo>
-                <a:lnTo>
-                  <a:pt x="559785" y="18052"/>
-                </a:lnTo>
-                <a:lnTo>
-                  <a:pt x="639386" y="4527"/>
-                </a:lnTo>
-                <a:lnTo>
-                  <a:pt x="720000" y="0"/>
-                </a:lnTo>
-                <a:close/>
-              </a:path>
-            </a:pathLst>
-          </a:custGeom>
-          <a:solidFill>
-            <a:srgbClr val="66874F"/>
-          </a:solidFill>
-          <a:ln>
-            <a:noFill/>
-          </a:ln>
-        </p:spPr>
-        <p:txBody>
-          <a:bodyPr rtlCol="0" anchor="ctr"/>
-          <a:lstStyle/>
-          <a:p>
-            <a:pPr algn="ctr"/>
-          </a:p>
-        </p:txBody>
-      </p:sp>
-      <p:sp>
-        <p:nvSpPr>
-          <p:cNvPr id="4" name="Oval 3"/>
-          <p:cNvSpPr/>
-          <p:nvPr/>
-        </p:nvSpPr>
-        <p:spPr>
-          <a:xfrm>
-            <a:off x="2811960" y="1372680"/>
-            <a:ext cx="136080" cy="136080"/>
-          </a:xfrm>
-          <a:prstGeom prst="ellipse">
-            <a:avLst/>
-          </a:prstGeom>
-          <a:solidFill>
-            <a:srgbClr val="666666"/>
-          </a:solidFill>
-          <a:ln>
-            <a:noFill/>
-          </a:ln>
-        </p:spPr>
-        <p:txBody>
-          <a:bodyPr rtlCol="0" anchor="ctr"/>
-          <a:lstStyle/>
-          <a:p>
-            <a:pPr algn="ctr"/>
-          </a:p>
-        </p:txBody>
-      </p:sp>
-      <p:sp>
-        <p:nvSpPr>
-          <p:cNvPr id="5" name="Rounded Rectangle 4"/>
-          <p:cNvSpPr/>
-          <p:nvPr/>
-        </p:nvSpPr>
-        <p:spPr>
-          <a:xfrm>
-            <a:off x="2847240" y="1506240"/>
-            <a:ext cx="65520" cy="40320"/>
-          </a:xfrm>
-          <a:prstGeom prst="roundRect">
-            <a:avLst>
-              <a:gd name="adj" fmla="val 18749"/>
-            </a:avLst>
-          </a:prstGeom>
-          <a:solidFill>
-            <a:srgbClr val="E0E0E0"/>
-          </a:solidFill>
-          <a:ln>
-            <a:noFill/>
-          </a:ln>
-        </p:spPr>
-        <p:txBody>
-          <a:bodyPr rtlCol="0" anchor="ctr"/>
-          <a:lstStyle/>
-          <a:p>
-            <a:pPr algn="ctr"/>
-          </a:p>
-        </p:txBody>
-      </p:sp>
-      <p:sp>
-        <p:nvSpPr>
-          <p:cNvPr id="6" name="Rounded Rectangle 5"/>
-          <p:cNvSpPr/>
-          <p:nvPr/>
-        </p:nvSpPr>
-        <p:spPr>
-          <a:xfrm>
-            <a:off x="2857320" y="1554120"/>
-            <a:ext cx="45360" cy="22680"/>
-          </a:xfrm>
-          <a:prstGeom prst="roundRect">
-            <a:avLst>
-              <a:gd name="adj" fmla="val 33333"/>
-            </a:avLst>
-          </a:prstGeom>
-          <a:solidFill>
-            <a:srgbClr val="E0E0E0"/>
-          </a:solidFill>
-          <a:ln>
-            <a:noFill/>
-          </a:ln>
-        </p:spPr>
-        <p:txBody>
-          <a:bodyPr rtlCol="0" anchor="ctr"/>
-          <a:lstStyle/>
-          <a:p>
-            <a:pPr algn="ctr"/>
-          </a:p>
-        </p:txBody>
-      </p:sp>
-      <p:sp>
-        <p:nvSpPr>
-          <p:cNvPr id="7" name="텍스트"/>
-          <p:cNvSpPr txBox="1"/>
-          <p:nvPr/>
-        </p:nvSpPr>
-        <p:spPr>
-          <a:xfrm>
-            <a:off x="252000" y="324000"/>
-            <a:ext cx="1944000" cy="720000"/>
+            <a:off x="216000" y="72000"/>
+            <a:ext cx="1080000" cy="936000"/>
           </a:xfrm>
           <a:prstGeom prst="rect">
             <a:avLst/>
@@ -3897,49 +3636,32 @@
           <a:p>
             <a:pPr algn="l">
               <a:lnSpc>
-                <a:spcPts val="1739"/>
+                <a:spcPts val="15950"/>
               </a:lnSpc>
             </a:pPr>
             <a:r>
-              <a:rPr sz="1200" b="1">
+              <a:rPr sz="11000" b="1">
                 <a:solidFill>
-                  <a:srgbClr val="FFFFFF"/>
+                  <a:srgbClr val="00B8E6"/>
                 </a:solidFill>
-                <a:latin typeface="바탕"/>
-                <a:ea typeface="바탕"/>
+                <a:latin typeface="맑은 고딕"/>
+                <a:ea typeface="맑은 고딕"/>
               </a:rPr>
-              <a:t>눈에 띄기보다</a:t>
-            </a:r>
-          </a:p>
-          <a:p>
-            <a:pPr algn="l">
-              <a:lnSpc>
-                <a:spcPts val="1739"/>
-              </a:lnSpc>
-            </a:pPr>
-            <a:r>
-              <a:rPr sz="1200" b="1">
-                <a:solidFill>
-                  <a:srgbClr val="FFFFFF"/>
-                </a:solidFill>
-                <a:latin typeface="바탕"/>
-                <a:ea typeface="바탕"/>
-              </a:rPr>
-              <a:t>마음에 남도록</a:t>
-            </a:r>
-          </a:p>
-        </p:txBody>
-      </p:sp>
-      <p:sp>
-        <p:nvSpPr>
-          <p:cNvPr id="8" name="텍스트"/>
+              <a:t>“</a:t>
+            </a:r>
+          </a:p>
+        </p:txBody>
+      </p:sp>
+      <p:sp>
+        <p:nvSpPr>
+          <p:cNvPr id="3" name="텍스트"/>
           <p:cNvSpPr txBox="1"/>
           <p:nvPr/>
         </p:nvSpPr>
         <p:spPr>
           <a:xfrm>
-            <a:off x="252000" y="1476000"/>
-            <a:ext cx="1440000" cy="108000"/>
+            <a:off x="252000" y="792000"/>
+            <a:ext cx="2520000" cy="648000"/>
           </a:xfrm>
           <a:prstGeom prst="rect">
             <a:avLst/>
@@ -3954,13 +3676,74 @@
           <a:p>
             <a:pPr algn="l">
               <a:lnSpc>
-                <a:spcPts val="1087"/>
+                <a:spcPts val="1812"/>
               </a:lnSpc>
             </a:pPr>
             <a:r>
-              <a:rPr sz="750" b="1" spc="200">
+              <a:rPr sz="1250" b="1">
                 <a:solidFill>
-                  <a:srgbClr val="DFE6DB"/>
+                  <a:srgbClr val="FFFFFF"/>
+                </a:solidFill>
+                <a:latin typeface="맑은 고딕"/>
+                <a:ea typeface="맑은 고딕"/>
+              </a:rPr>
+              <a:t>눈에 띄기보다 마음에 남도록</a:t>
+            </a:r>
+          </a:p>
+        </p:txBody>
+      </p:sp>
+      <p:cxnSp>
+        <p:nvCxnSpPr>
+          <p:cNvPr id="4" name="Connector 3"/>
+          <p:cNvCxnSpPr/>
+          <p:nvPr/>
+        </p:nvCxnSpPr>
+        <p:spPr>
+          <a:xfrm>
+            <a:off x="252000" y="1512000"/>
+            <a:ext cx="2736000" cy="0"/>
+          </a:xfrm>
+          <a:prstGeom prst="line">
+            <a:avLst/>
+          </a:prstGeom>
+          <a:ln w="5760">
+            <a:solidFill>
+              <a:srgbClr val="2A2F38"/>
+            </a:solidFill>
+          </a:ln>
+        </p:spPr>
+      </p:cxnSp>
+      <p:sp>
+        <p:nvSpPr>
+          <p:cNvPr id="5" name="텍스트"/>
+          <p:cNvSpPr txBox="1"/>
+          <p:nvPr/>
+        </p:nvSpPr>
+        <p:spPr>
+          <a:xfrm>
+            <a:off x="252000" y="1569600"/>
+            <a:ext cx="2736000" cy="123826"/>
+          </a:xfrm>
+          <a:prstGeom prst="rect">
+            <a:avLst/>
+          </a:prstGeom>
+          <a:noFill/>
+        </p:spPr>
+        <p:txBody>
+          <a:bodyPr wrap="square" lIns="0" rIns="0" tIns="0" bIns="0" anchor="t">
+            <a:spAutoFit/>
+          </a:bodyPr>
+          <a:lstStyle/>
+          <a:p>
+            <a:pPr algn="r">
+              <a:lnSpc>
+                <a:spcPts val="942"/>
+              </a:lnSpc>
+            </a:pPr>
+            <a:r>
+              <a:rPr sz="650" b="1" spc="200">
+                <a:solidFill>
+                  <a:srgbClr val="A3A9B5"/>
                 </a:solidFill>
                 <a:latin typeface="맑은 고딕"/>
                 <a:ea typeface="맑은 고딕"/>

--- a/public/fun/cards/creative/creative-35.pptx
+++ b/public/fun/cards/creative/creative-35.pptx
@@ -3105,8 +3105,8 @@
         </p:nvSpPr>
         <p:spPr>
           <a:xfrm>
-            <a:off x="2016000" y="0"/>
-            <a:ext cx="1224000" cy="1800000"/>
+            <a:off x="2124000" y="0"/>
+            <a:ext cx="1116000" cy="1800000"/>
           </a:xfrm>
           <a:custGeom>
             <a:avLst/>
@@ -3115,15 +3115,15 @@
             <a:cxnLst/>
             <a:rect l="l" t="t" r="r" b="b"/>
             <a:pathLst>
-              <a:path w="1224000" h="1800000">
+              <a:path w="1116000" h="1800000">
                 <a:moveTo>
                   <a:pt x="360000" y="0"/>
                 </a:moveTo>
                 <a:lnTo>
-                  <a:pt x="1224000" y="0"/>
+                  <a:pt x="1116000" y="0"/>
                 </a:lnTo>
                 <a:lnTo>
-                  <a:pt x="1224000" y="1800000"/>
+                  <a:pt x="1116000" y="1800000"/>
                 </a:lnTo>
                 <a:lnTo>
                   <a:pt x="0" y="1800000"/>
@@ -3147,66 +3147,79 @@
           </a:p>
         </p:txBody>
       </p:sp>
-      <p:sp>
-        <p:nvSpPr>
-          <p:cNvPr id="3" name="Freeform 2"/>
-          <p:cNvSpPr/>
+      <p:cxnSp>
+        <p:nvCxnSpPr>
+          <p:cNvPr id="3" name="Connector 2"/>
+          <p:cNvCxnSpPr/>
           <p:nvPr/>
-        </p:nvSpPr>
-        <p:spPr>
-          <a:xfrm>
-            <a:off x="1864800" y="0"/>
-            <a:ext cx="460800" cy="1800000"/>
-          </a:xfrm>
-          <a:custGeom>
+        </p:nvCxnSpPr>
+        <p:spPr>
+          <a:xfrm flipH="1">
+            <a:off x="2044800" y="0"/>
+            <a:ext cx="360000" cy="1800000"/>
+          </a:xfrm>
+          <a:prstGeom prst="line">
             <a:avLst/>
-            <a:gdLst/>
-            <a:ahLst/>
-            <a:cxnLst/>
-            <a:rect l="l" t="t" r="r" b="b"/>
-            <a:pathLst>
-              <a:path w="460800" h="1800000">
-                <a:moveTo>
-                  <a:pt x="360000" y="0"/>
-                </a:moveTo>
-                <a:lnTo>
-                  <a:pt x="460800" y="0"/>
-                </a:lnTo>
-                <a:lnTo>
-                  <a:pt x="100800" y="1800000"/>
-                </a:lnTo>
-                <a:lnTo>
-                  <a:pt x="0" y="1800000"/>
-                </a:lnTo>
-                <a:close/>
-              </a:path>
-            </a:pathLst>
-          </a:custGeom>
-          <a:solidFill>
-            <a:srgbClr val="26292D"/>
-          </a:solidFill>
-          <a:ln>
-            <a:noFill/>
+          </a:prstGeom>
+          <a:ln w="3600">
+            <a:solidFill>
+              <a:srgbClr val="26292D"/>
+            </a:solidFill>
           </a:ln>
         </p:spPr>
-        <p:txBody>
-          <a:bodyPr rtlCol="0" anchor="ctr"/>
-          <a:lstStyle/>
-          <a:p>
-            <a:pPr algn="ctr"/>
-          </a:p>
-        </p:txBody>
-      </p:sp>
-      <p:sp>
-        <p:nvSpPr>
-          <p:cNvPr id="4" name="텍스트"/>
+      </p:cxnSp>
+      <p:cxnSp>
+        <p:nvCxnSpPr>
+          <p:cNvPr id="4" name="Connector 3"/>
+          <p:cNvCxnSpPr/>
+          <p:nvPr/>
+        </p:nvCxnSpPr>
+        <p:spPr>
+          <a:xfrm flipH="1">
+            <a:off x="1965600" y="0"/>
+            <a:ext cx="360000" cy="1800000"/>
+          </a:xfrm>
+          <a:prstGeom prst="line">
+            <a:avLst/>
+          </a:prstGeom>
+          <a:ln w="3600">
+            <a:solidFill>
+              <a:srgbClr val="26292D"/>
+            </a:solidFill>
+          </a:ln>
+        </p:spPr>
+      </p:cxnSp>
+      <p:cxnSp>
+        <p:nvCxnSpPr>
+          <p:cNvPr id="5" name="Connector 4"/>
+          <p:cNvCxnSpPr/>
+          <p:nvPr/>
+        </p:nvCxnSpPr>
+        <p:spPr>
+          <a:xfrm flipH="1">
+            <a:off x="1886400" y="0"/>
+            <a:ext cx="360000" cy="1800000"/>
+          </a:xfrm>
+          <a:prstGeom prst="line">
+            <a:avLst/>
+          </a:prstGeom>
+          <a:ln w="3600">
+            <a:solidFill>
+              <a:srgbClr val="26292D"/>
+            </a:solidFill>
+          </a:ln>
+        </p:spPr>
+      </p:cxnSp>
+      <p:sp>
+        <p:nvSpPr>
+          <p:cNvPr id="6" name="텍스트"/>
           <p:cNvSpPr txBox="1"/>
           <p:nvPr/>
         </p:nvSpPr>
         <p:spPr>
           <a:xfrm>
-            <a:off x="252000" y="223200"/>
-            <a:ext cx="1440000" cy="133351"/>
+            <a:off x="252000" y="252000"/>
+            <a:ext cx="1440000" cy="123826"/>
           </a:xfrm>
           <a:prstGeom prst="rect">
             <a:avLst/>
@@ -3221,11 +3234,11 @@
           <a:p>
             <a:pPr algn="l">
               <a:lnSpc>
-                <a:spcPts val="1015"/>
+                <a:spcPts val="942"/>
               </a:lnSpc>
             </a:pPr>
             <a:r>
-              <a:rPr sz="700" b="1" spc="200">
+              <a:rPr sz="650" b="1" spc="220">
                 <a:solidFill>
                   <a:srgbClr val="A3A9B5"/>
                 </a:solidFill>
@@ -3237,16 +3250,37 @@
           </a:p>
         </p:txBody>
       </p:sp>
-      <p:sp>
-        <p:nvSpPr>
-          <p:cNvPr id="5" name="텍스트"/>
+      <p:cxnSp>
+        <p:nvCxnSpPr>
+          <p:cNvPr id="7" name="Connector 6"/>
+          <p:cNvCxnSpPr/>
+          <p:nvPr/>
+        </p:nvCxnSpPr>
+        <p:spPr>
+          <a:xfrm>
+            <a:off x="252000" y="374400"/>
+            <a:ext cx="1260000" cy="0"/>
+          </a:xfrm>
+          <a:prstGeom prst="line">
+            <a:avLst/>
+          </a:prstGeom>
+          <a:ln w="3600">
+            <a:solidFill>
+              <a:srgbClr val="2A2F38"/>
+            </a:solidFill>
+          </a:ln>
+        </p:spPr>
+      </p:cxnSp>
+      <p:sp>
+        <p:nvSpPr>
+          <p:cNvPr id="8" name="텍스트"/>
           <p:cNvSpPr txBox="1"/>
           <p:nvPr/>
         </p:nvSpPr>
         <p:spPr>
           <a:xfrm>
-            <a:off x="252000" y="540000"/>
-            <a:ext cx="1584000" cy="360000"/>
+            <a:off x="252000" y="633600"/>
+            <a:ext cx="1800000" cy="237600"/>
           </a:xfrm>
           <a:prstGeom prst="rect">
             <a:avLst/>
@@ -3261,11 +3295,11 @@
           <a:p>
             <a:pPr algn="l">
               <a:lnSpc>
-                <a:spcPts val="3190"/>
+                <a:spcPts val="1957"/>
               </a:lnSpc>
             </a:pPr>
             <a:r>
-              <a:rPr sz="2200" b="1">
+              <a:rPr sz="1350" b="1" spc="120">
                 <a:solidFill>
                   <a:srgbClr val="FFFFFF"/>
                 </a:solidFill>
@@ -3279,14 +3313,14 @@
       </p:sp>
       <p:sp>
         <p:nvSpPr>
-          <p:cNvPr id="6" name="텍스트"/>
+          <p:cNvPr id="9" name="텍스트"/>
           <p:cNvSpPr txBox="1"/>
           <p:nvPr/>
         </p:nvSpPr>
         <p:spPr>
           <a:xfrm>
-            <a:off x="252000" y="943200"/>
-            <a:ext cx="1584000" cy="171451"/>
+            <a:off x="252000" y="885600"/>
+            <a:ext cx="1800000" cy="133351"/>
           </a:xfrm>
           <a:prstGeom prst="rect">
             <a:avLst/>
@@ -3301,11 +3335,11 @@
           <a:p>
             <a:pPr algn="l">
               <a:lnSpc>
-                <a:spcPts val="1305"/>
+                <a:spcPts val="1015"/>
               </a:lnSpc>
             </a:pPr>
             <a:r>
-              <a:rPr sz="900" b="0">
+              <a:rPr sz="700" b="0" spc="60">
                 <a:solidFill>
                   <a:srgbClr val="A3A9B5"/>
                 </a:solidFill>
@@ -3319,14 +3353,14 @@
       </p:sp>
       <p:sp>
         <p:nvSpPr>
-          <p:cNvPr id="7" name="Rectangle 6"/>
+          <p:cNvPr id="10" name="Rectangle 9"/>
           <p:cNvSpPr/>
           <p:nvPr/>
         </p:nvSpPr>
         <p:spPr>
           <a:xfrm>
-            <a:off x="252000" y="1195200"/>
-            <a:ext cx="144000" cy="18000"/>
+            <a:off x="252000" y="1044000"/>
+            <a:ext cx="129600" cy="14400"/>
           </a:xfrm>
           <a:prstGeom prst="rect">
             <a:avLst/>
@@ -3348,14 +3382,14 @@
       </p:sp>
       <p:sp>
         <p:nvSpPr>
-          <p:cNvPr id="8" name="텍스트"/>
+          <p:cNvPr id="11" name="텍스트"/>
           <p:cNvSpPr txBox="1"/>
           <p:nvPr/>
         </p:nvSpPr>
         <p:spPr>
           <a:xfrm>
-            <a:off x="252000" y="1328400"/>
-            <a:ext cx="331200" cy="99061"/>
+            <a:off x="252000" y="1184400"/>
+            <a:ext cx="324000" cy="91441"/>
           </a:xfrm>
           <a:prstGeom prst="rect">
             <a:avLst/>
@@ -3370,11 +3404,11 @@
           <a:p>
             <a:pPr algn="l">
               <a:lnSpc>
-                <a:spcPts val="754"/>
+                <a:spcPts val="696"/>
               </a:lnSpc>
             </a:pPr>
             <a:r>
-              <a:rPr sz="520" b="1" spc="120">
+              <a:rPr sz="480" b="1" spc="140">
                 <a:solidFill>
                   <a:srgbClr val="A3A9B5"/>
                 </a:solidFill>
@@ -3388,14 +3422,14 @@
       </p:sp>
       <p:sp>
         <p:nvSpPr>
-          <p:cNvPr id="9" name="텍스트"/>
+          <p:cNvPr id="12" name="텍스트"/>
           <p:cNvSpPr txBox="1"/>
           <p:nvPr/>
         </p:nvSpPr>
         <p:spPr>
           <a:xfrm>
-            <a:off x="583200" y="1317600"/>
-            <a:ext cx="1188000" cy="125731"/>
+            <a:off x="576000" y="1173600"/>
+            <a:ext cx="972000" cy="120016"/>
           </a:xfrm>
           <a:prstGeom prst="rect">
             <a:avLst/>
@@ -3410,11 +3444,11 @@
           <a:p>
             <a:pPr algn="l">
               <a:lnSpc>
-                <a:spcPts val="956"/>
+                <a:spcPts val="913"/>
               </a:lnSpc>
             </a:pPr>
             <a:r>
-              <a:rPr sz="660" b="0">
+              <a:rPr sz="630" b="0">
                 <a:solidFill>
                   <a:srgbClr val="FFFFFF"/>
                 </a:solidFill>
@@ -3428,14 +3462,14 @@
       </p:sp>
       <p:sp>
         <p:nvSpPr>
-          <p:cNvPr id="10" name="텍스트"/>
+          <p:cNvPr id="13" name="텍스트"/>
           <p:cNvSpPr txBox="1"/>
           <p:nvPr/>
         </p:nvSpPr>
         <p:spPr>
           <a:xfrm>
-            <a:off x="252000" y="1458000"/>
-            <a:ext cx="331200" cy="99061"/>
+            <a:off x="252000" y="1314000"/>
+            <a:ext cx="324000" cy="91441"/>
           </a:xfrm>
           <a:prstGeom prst="rect">
             <a:avLst/>
@@ -3450,11 +3484,11 @@
           <a:p>
             <a:pPr algn="l">
               <a:lnSpc>
-                <a:spcPts val="754"/>
+                <a:spcPts val="696"/>
               </a:lnSpc>
             </a:pPr>
             <a:r>
-              <a:rPr sz="520" b="1" spc="120">
+              <a:rPr sz="480" b="1" spc="140">
                 <a:solidFill>
                   <a:srgbClr val="A3A9B5"/>
                 </a:solidFill>
@@ -3468,14 +3502,14 @@
       </p:sp>
       <p:sp>
         <p:nvSpPr>
-          <p:cNvPr id="11" name="텍스트"/>
+          <p:cNvPr id="14" name="텍스트"/>
           <p:cNvSpPr txBox="1"/>
           <p:nvPr/>
         </p:nvSpPr>
         <p:spPr>
           <a:xfrm>
-            <a:off x="583200" y="1447200"/>
-            <a:ext cx="1188000" cy="125731"/>
+            <a:off x="576000" y="1303200"/>
+            <a:ext cx="972000" cy="120016"/>
           </a:xfrm>
           <a:prstGeom prst="rect">
             <a:avLst/>
@@ -3490,11 +3524,11 @@
           <a:p>
             <a:pPr algn="l">
               <a:lnSpc>
-                <a:spcPts val="956"/>
+                <a:spcPts val="913"/>
               </a:lnSpc>
             </a:pPr>
             <a:r>
-              <a:rPr sz="660" b="0">
+              <a:rPr sz="630" b="0">
                 <a:solidFill>
                   <a:srgbClr val="FFFFFF"/>
                 </a:solidFill>
@@ -3508,14 +3542,14 @@
       </p:sp>
       <p:sp>
         <p:nvSpPr>
-          <p:cNvPr id="12" name="텍스트"/>
+          <p:cNvPr id="15" name="텍스트"/>
           <p:cNvSpPr txBox="1"/>
           <p:nvPr/>
         </p:nvSpPr>
         <p:spPr>
           <a:xfrm>
-            <a:off x="252000" y="1587600"/>
-            <a:ext cx="331200" cy="99061"/>
+            <a:off x="252000" y="1443600"/>
+            <a:ext cx="324000" cy="91441"/>
           </a:xfrm>
           <a:prstGeom prst="rect">
             <a:avLst/>
@@ -3530,11 +3564,11 @@
           <a:p>
             <a:pPr algn="l">
               <a:lnSpc>
-                <a:spcPts val="754"/>
+                <a:spcPts val="696"/>
               </a:lnSpc>
             </a:pPr>
             <a:r>
-              <a:rPr sz="520" b="1" spc="120">
+              <a:rPr sz="480" b="1" spc="140">
                 <a:solidFill>
                   <a:srgbClr val="A3A9B5"/>
                 </a:solidFill>
@@ -3548,14 +3582,14 @@
       </p:sp>
       <p:sp>
         <p:nvSpPr>
-          <p:cNvPr id="13" name="텍스트"/>
+          <p:cNvPr id="16" name="텍스트"/>
           <p:cNvSpPr txBox="1"/>
           <p:nvPr/>
         </p:nvSpPr>
         <p:spPr>
           <a:xfrm>
-            <a:off x="583200" y="1576800"/>
-            <a:ext cx="1188000" cy="125731"/>
+            <a:off x="576000" y="1432800"/>
+            <a:ext cx="972000" cy="120016"/>
           </a:xfrm>
           <a:prstGeom prst="rect">
             <a:avLst/>
@@ -3570,11 +3604,11 @@
           <a:p>
             <a:pPr algn="l">
               <a:lnSpc>
-                <a:spcPts val="956"/>
+                <a:spcPts val="913"/>
               </a:lnSpc>
             </a:pPr>
             <a:r>
-              <a:rPr sz="660" b="0">
+              <a:rPr sz="630" b="0">
                 <a:solidFill>
                   <a:srgbClr val="FFFFFF"/>
                 </a:solidFill>
@@ -3614,19 +3648,79 @@
       <p:grpSpPr/>
       <p:sp>
         <p:nvSpPr>
-          <p:cNvPr id="2" name="텍스트"/>
-          <p:cNvSpPr txBox="1"/>
+          <p:cNvPr id="2" name="Rectangle 1"/>
+          <p:cNvSpPr/>
           <p:nvPr/>
         </p:nvSpPr>
         <p:spPr>
           <a:xfrm>
-            <a:off x="216000" y="72000"/>
-            <a:ext cx="1080000" cy="936000"/>
+            <a:off x="0" y="0"/>
+            <a:ext cx="3240000" cy="1800000"/>
+          </a:xfrm>
+          <a:prstGeom prst="rect">
+            <a:avLst/>
+          </a:prstGeom>
+          <a:solidFill>
+            <a:srgbClr val="00B8E6"/>
+          </a:solidFill>
+          <a:ln>
+            <a:noFill/>
+          </a:ln>
+        </p:spPr>
+        <p:txBody>
+          <a:bodyPr rtlCol="0" anchor="ctr"/>
+          <a:lstStyle/>
+          <a:p>
+            <a:pPr algn="ctr"/>
+          </a:p>
+        </p:txBody>
+      </p:sp>
+      <p:sp>
+        <p:nvSpPr>
+          <p:cNvPr id="3" name="Rectangle 2"/>
+          <p:cNvSpPr/>
+          <p:nvPr/>
+        </p:nvSpPr>
+        <p:spPr>
+          <a:xfrm>
+            <a:off x="108000" y="108000"/>
+            <a:ext cx="3024000" cy="1584000"/>
           </a:xfrm>
           <a:prstGeom prst="rect">
             <a:avLst/>
           </a:prstGeom>
           <a:noFill/>
+          <a:ln w="3600">
+            <a:solidFill>
+              <a:srgbClr val="12151C">
+                <a:alpha val="50000"/>
+              </a:srgbClr>
+            </a:solidFill>
+          </a:ln>
+        </p:spPr>
+        <p:txBody>
+          <a:bodyPr rtlCol="0" anchor="ctr"/>
+          <a:lstStyle/>
+          <a:p>
+            <a:pPr algn="ctr"/>
+          </a:p>
+        </p:txBody>
+      </p:sp>
+      <p:sp>
+        <p:nvSpPr>
+          <p:cNvPr id="4" name="텍스트"/>
+          <p:cNvSpPr txBox="1"/>
+          <p:nvPr/>
+        </p:nvSpPr>
+        <p:spPr>
+          <a:xfrm>
+            <a:off x="288000" y="280800"/>
+            <a:ext cx="1440000" cy="99061"/>
+          </a:xfrm>
+          <a:prstGeom prst="rect">
+            <a:avLst/>
+          </a:prstGeom>
+          <a:noFill/>
         </p:spPr>
         <p:txBody>
           <a:bodyPr wrap="square" lIns="0" rIns="0" tIns="0" bIns="0" anchor="t">
@@ -3636,32 +3730,32 @@
           <a:p>
             <a:pPr algn="l">
               <a:lnSpc>
-                <a:spcPts val="15950"/>
+                <a:spcPts val="754"/>
               </a:lnSpc>
             </a:pPr>
             <a:r>
-              <a:rPr sz="11000" b="1">
+              <a:rPr sz="520" b="1" spc="240">
                 <a:solidFill>
-                  <a:srgbClr val="00B8E6"/>
+                  <a:srgbClr val="12151C"/>
                 </a:solidFill>
                 <a:latin typeface="맑은 고딕"/>
                 <a:ea typeface="맑은 고딕"/>
               </a:rPr>
-              <a:t>“</a:t>
-            </a:r>
-          </a:p>
-        </p:txBody>
-      </p:sp>
-      <p:sp>
-        <p:nvSpPr>
-          <p:cNvPr id="3" name="텍스트"/>
+              <a:t>작업 분야</a:t>
+            </a:r>
+          </a:p>
+        </p:txBody>
+      </p:sp>
+      <p:sp>
+        <p:nvSpPr>
+          <p:cNvPr id="5" name="텍스트"/>
           <p:cNvSpPr txBox="1"/>
           <p:nvPr/>
         </p:nvSpPr>
         <p:spPr>
           <a:xfrm>
-            <a:off x="252000" y="792000"/>
-            <a:ext cx="2520000" cy="648000"/>
+            <a:off x="288000" y="468000"/>
+            <a:ext cx="1872000" cy="216000"/>
           </a:xfrm>
           <a:prstGeom prst="rect">
             <a:avLst/>
@@ -3676,53 +3770,53 @@
           <a:p>
             <a:pPr algn="l">
               <a:lnSpc>
-                <a:spcPts val="1812"/>
+                <a:spcPts val="1377"/>
               </a:lnSpc>
             </a:pPr>
             <a:r>
-              <a:rPr sz="1250" b="1">
+              <a:rPr sz="950" b="1">
                 <a:solidFill>
-                  <a:srgbClr val="FFFFFF"/>
+                  <a:srgbClr val="12151C"/>
                 </a:solidFill>
                 <a:latin typeface="맑은 고딕"/>
                 <a:ea typeface="맑은 고딕"/>
               </a:rPr>
-              <a:t>눈에 띄기보다 마음에 남도록</a:t>
+              <a:t>로고 디자인</a:t>
             </a:r>
           </a:p>
         </p:txBody>
       </p:sp>
       <p:cxnSp>
         <p:nvCxnSpPr>
-          <p:cNvPr id="4" name="Connector 3"/>
+          <p:cNvPr id="6" name="Connector 5"/>
           <p:cNvCxnSpPr/>
           <p:nvPr/>
         </p:nvCxnSpPr>
         <p:spPr>
           <a:xfrm>
-            <a:off x="252000" y="1512000"/>
-            <a:ext cx="2736000" cy="0"/>
+            <a:off x="288000" y="669600"/>
+            <a:ext cx="1728000" cy="0"/>
           </a:xfrm>
           <a:prstGeom prst="line">
             <a:avLst/>
           </a:prstGeom>
-          <a:ln w="5760">
+          <a:ln w="3600">
             <a:solidFill>
-              <a:srgbClr val="2A2F38"/>
+              <a:srgbClr val="12151C"/>
             </a:solidFill>
           </a:ln>
         </p:spPr>
       </p:cxnSp>
       <p:sp>
         <p:nvSpPr>
-          <p:cNvPr id="5" name="텍스트"/>
+          <p:cNvPr id="7" name="텍스트"/>
           <p:cNvSpPr txBox="1"/>
           <p:nvPr/>
         </p:nvSpPr>
         <p:spPr>
           <a:xfrm>
-            <a:off x="252000" y="1569600"/>
-            <a:ext cx="2736000" cy="123826"/>
+            <a:off x="288000" y="691200"/>
+            <a:ext cx="1872000" cy="216000"/>
           </a:xfrm>
           <a:prstGeom prst="rect">
             <a:avLst/>
@@ -3735,15 +3829,362 @@
           </a:bodyPr>
           <a:lstStyle/>
           <a:p>
-            <a:pPr algn="r">
+            <a:pPr algn="l">
+              <a:lnSpc>
+                <a:spcPts val="1377"/>
+              </a:lnSpc>
+            </a:pPr>
+            <a:r>
+              <a:rPr sz="950" b="1">
+                <a:solidFill>
+                  <a:srgbClr val="12151C"/>
+                </a:solidFill>
+                <a:latin typeface="맑은 고딕"/>
+                <a:ea typeface="맑은 고딕"/>
+              </a:rPr>
+              <a:t>일러스트</a:t>
+            </a:r>
+          </a:p>
+        </p:txBody>
+      </p:sp>
+      <p:cxnSp>
+        <p:nvCxnSpPr>
+          <p:cNvPr id="8" name="Connector 7"/>
+          <p:cNvCxnSpPr/>
+          <p:nvPr/>
+        </p:nvCxnSpPr>
+        <p:spPr>
+          <a:xfrm>
+            <a:off x="288000" y="892800"/>
+            <a:ext cx="1728000" cy="0"/>
+          </a:xfrm>
+          <a:prstGeom prst="line">
+            <a:avLst/>
+          </a:prstGeom>
+          <a:ln w="3600">
+            <a:solidFill>
+              <a:srgbClr val="12151C"/>
+            </a:solidFill>
+          </a:ln>
+        </p:spPr>
+      </p:cxnSp>
+      <p:sp>
+        <p:nvSpPr>
+          <p:cNvPr id="9" name="텍스트"/>
+          <p:cNvSpPr txBox="1"/>
+          <p:nvPr/>
+        </p:nvSpPr>
+        <p:spPr>
+          <a:xfrm>
+            <a:off x="288000" y="914400"/>
+            <a:ext cx="1872000" cy="216000"/>
+          </a:xfrm>
+          <a:prstGeom prst="rect">
+            <a:avLst/>
+          </a:prstGeom>
+          <a:noFill/>
+        </p:spPr>
+        <p:txBody>
+          <a:bodyPr wrap="square" lIns="0" rIns="0" tIns="0" bIns="0" anchor="t">
+            <a:spAutoFit/>
+          </a:bodyPr>
+          <a:lstStyle/>
+          <a:p>
+            <a:pPr algn="l">
+              <a:lnSpc>
+                <a:spcPts val="1377"/>
+              </a:lnSpc>
+            </a:pPr>
+            <a:r>
+              <a:rPr sz="950" b="1">
+                <a:solidFill>
+                  <a:srgbClr val="12151C"/>
+                </a:solidFill>
+                <a:latin typeface="맑은 고딕"/>
+                <a:ea typeface="맑은 고딕"/>
+              </a:rPr>
+              <a:t>패키지</a:t>
+            </a:r>
+          </a:p>
+        </p:txBody>
+      </p:sp>
+      <p:cxnSp>
+        <p:nvCxnSpPr>
+          <p:cNvPr id="10" name="Connector 9"/>
+          <p:cNvCxnSpPr/>
+          <p:nvPr/>
+        </p:nvCxnSpPr>
+        <p:spPr>
+          <a:xfrm>
+            <a:off x="288000" y="1116000"/>
+            <a:ext cx="1728000" cy="0"/>
+          </a:xfrm>
+          <a:prstGeom prst="line">
+            <a:avLst/>
+          </a:prstGeom>
+          <a:ln w="3600">
+            <a:solidFill>
+              <a:srgbClr val="12151C"/>
+            </a:solidFill>
+          </a:ln>
+        </p:spPr>
+      </p:cxnSp>
+      <p:sp>
+        <p:nvSpPr>
+          <p:cNvPr id="11" name="텍스트"/>
+          <p:cNvSpPr txBox="1"/>
+          <p:nvPr/>
+        </p:nvSpPr>
+        <p:spPr>
+          <a:xfrm>
+            <a:off x="288000" y="1137600"/>
+            <a:ext cx="1872000" cy="216000"/>
+          </a:xfrm>
+          <a:prstGeom prst="rect">
+            <a:avLst/>
+          </a:prstGeom>
+          <a:noFill/>
+        </p:spPr>
+        <p:txBody>
+          <a:bodyPr wrap="square" lIns="0" rIns="0" tIns="0" bIns="0" anchor="t">
+            <a:spAutoFit/>
+          </a:bodyPr>
+          <a:lstStyle/>
+          <a:p>
+            <a:pPr algn="l">
+              <a:lnSpc>
+                <a:spcPts val="1377"/>
+              </a:lnSpc>
+            </a:pPr>
+            <a:r>
+              <a:rPr sz="950" b="1">
+                <a:solidFill>
+                  <a:srgbClr val="12151C"/>
+                </a:solidFill>
+                <a:latin typeface="맑은 고딕"/>
+                <a:ea typeface="맑은 고딕"/>
+              </a:rPr>
+              <a:t>외주 문의</a:t>
+            </a:r>
+          </a:p>
+        </p:txBody>
+      </p:sp>
+      <p:cxnSp>
+        <p:nvCxnSpPr>
+          <p:cNvPr id="12" name="Connector 11"/>
+          <p:cNvCxnSpPr/>
+          <p:nvPr/>
+        </p:nvCxnSpPr>
+        <p:spPr>
+          <a:xfrm>
+            <a:off x="288000" y="1339200"/>
+            <a:ext cx="1728000" cy="0"/>
+          </a:xfrm>
+          <a:prstGeom prst="line">
+            <a:avLst/>
+          </a:prstGeom>
+          <a:ln w="3600">
+            <a:solidFill>
+              <a:srgbClr val="12151C"/>
+            </a:solidFill>
+          </a:ln>
+        </p:spPr>
+      </p:cxnSp>
+      <p:sp>
+        <p:nvSpPr>
+          <p:cNvPr id="13" name="텍스트"/>
+          <p:cNvSpPr txBox="1"/>
+          <p:nvPr/>
+        </p:nvSpPr>
+        <p:spPr>
+          <a:xfrm>
+            <a:off x="2268000" y="468000"/>
+            <a:ext cx="864000" cy="91441"/>
+          </a:xfrm>
+          <a:prstGeom prst="rect">
+            <a:avLst/>
+          </a:prstGeom>
+          <a:noFill/>
+        </p:spPr>
+        <p:txBody>
+          <a:bodyPr wrap="square" lIns="0" rIns="0" tIns="0" bIns="0" anchor="t">
+            <a:spAutoFit/>
+          </a:bodyPr>
+          <a:lstStyle/>
+          <a:p>
+            <a:pPr algn="l">
+              <a:lnSpc>
+                <a:spcPts val="696"/>
+              </a:lnSpc>
+            </a:pPr>
+            <a:r>
+              <a:rPr sz="480" b="1" spc="140">
+                <a:solidFill>
+                  <a:srgbClr val="12151C">
+                    <a:alpha val="75000"/>
+                  </a:srgbClr>
+                </a:solidFill>
+                <a:latin typeface="맑은 고딕"/>
+                <a:ea typeface="맑은 고딕"/>
+              </a:rPr>
+              <a:t>HOURS</a:t>
+            </a:r>
+          </a:p>
+        </p:txBody>
+      </p:sp>
+      <p:sp>
+        <p:nvSpPr>
+          <p:cNvPr id="14" name="텍스트"/>
+          <p:cNvSpPr txBox="1"/>
+          <p:nvPr/>
+        </p:nvSpPr>
+        <p:spPr>
+          <a:xfrm>
+            <a:off x="2268000" y="576000"/>
+            <a:ext cx="864000" cy="118111"/>
+          </a:xfrm>
+          <a:prstGeom prst="rect">
+            <a:avLst/>
+          </a:prstGeom>
+          <a:noFill/>
+        </p:spPr>
+        <p:txBody>
+          <a:bodyPr wrap="square" lIns="0" rIns="0" tIns="0" bIns="0" anchor="t">
+            <a:spAutoFit/>
+          </a:bodyPr>
+          <a:lstStyle/>
+          <a:p>
+            <a:pPr algn="l">
+              <a:lnSpc>
+                <a:spcPts val="899"/>
+              </a:lnSpc>
+            </a:pPr>
+            <a:r>
+              <a:rPr sz="620" b="1">
+                <a:solidFill>
+                  <a:srgbClr val="12151C"/>
+                </a:solidFill>
+                <a:latin typeface="맑은 고딕"/>
+                <a:ea typeface="맑은 고딕"/>
+              </a:rPr>
+              <a:t>예약 후 방문</a:t>
+            </a:r>
+          </a:p>
+        </p:txBody>
+      </p:sp>
+      <p:sp>
+        <p:nvSpPr>
+          <p:cNvPr id="15" name="텍스트"/>
+          <p:cNvSpPr txBox="1"/>
+          <p:nvPr/>
+        </p:nvSpPr>
+        <p:spPr>
+          <a:xfrm>
+            <a:off x="2268000" y="900000"/>
+            <a:ext cx="864000" cy="91441"/>
+          </a:xfrm>
+          <a:prstGeom prst="rect">
+            <a:avLst/>
+          </a:prstGeom>
+          <a:noFill/>
+        </p:spPr>
+        <p:txBody>
+          <a:bodyPr wrap="square" lIns="0" rIns="0" tIns="0" bIns="0" anchor="t">
+            <a:spAutoFit/>
+          </a:bodyPr>
+          <a:lstStyle/>
+          <a:p>
+            <a:pPr algn="l">
+              <a:lnSpc>
+                <a:spcPts val="696"/>
+              </a:lnSpc>
+            </a:pPr>
+            <a:r>
+              <a:rPr sz="480" b="1" spc="140">
+                <a:solidFill>
+                  <a:srgbClr val="12151C">
+                    <a:alpha val="75000"/>
+                  </a:srgbClr>
+                </a:solidFill>
+                <a:latin typeface="맑은 고딕"/>
+                <a:ea typeface="맑은 고딕"/>
+              </a:rPr>
+              <a:t>INSTAGRAM</a:t>
+            </a:r>
+          </a:p>
+        </p:txBody>
+      </p:sp>
+      <p:sp>
+        <p:nvSpPr>
+          <p:cNvPr id="16" name="텍스트"/>
+          <p:cNvSpPr txBox="1"/>
+          <p:nvPr/>
+        </p:nvSpPr>
+        <p:spPr>
+          <a:xfrm>
+            <a:off x="2268000" y="1008000"/>
+            <a:ext cx="864000" cy="118111"/>
+          </a:xfrm>
+          <a:prstGeom prst="rect">
+            <a:avLst/>
+          </a:prstGeom>
+          <a:noFill/>
+        </p:spPr>
+        <p:txBody>
+          <a:bodyPr wrap="square" lIns="0" rIns="0" tIns="0" bIns="0" anchor="t">
+            <a:spAutoFit/>
+          </a:bodyPr>
+          <a:lstStyle/>
+          <a:p>
+            <a:pPr algn="l">
+              <a:lnSpc>
+                <a:spcPts val="899"/>
+              </a:lnSpc>
+            </a:pPr>
+            <a:r>
+              <a:rPr sz="620" b="1">
+                <a:solidFill>
+                  <a:srgbClr val="12151C"/>
+                </a:solidFill>
+                <a:latin typeface="맑은 고딕"/>
+                <a:ea typeface="맑은 고딕"/>
+              </a:rPr>
+              <a:t>@아이디</a:t>
+            </a:r>
+          </a:p>
+        </p:txBody>
+      </p:sp>
+      <p:sp>
+        <p:nvSpPr>
+          <p:cNvPr id="17" name="텍스트"/>
+          <p:cNvSpPr txBox="1"/>
+          <p:nvPr/>
+        </p:nvSpPr>
+        <p:spPr>
+          <a:xfrm>
+            <a:off x="288000" y="1512000"/>
+            <a:ext cx="1800000" cy="123826"/>
+          </a:xfrm>
+          <a:prstGeom prst="rect">
+            <a:avLst/>
+          </a:prstGeom>
+          <a:noFill/>
+        </p:spPr>
+        <p:txBody>
+          <a:bodyPr wrap="square" lIns="0" rIns="0" tIns="0" bIns="0" anchor="t">
+            <a:spAutoFit/>
+          </a:bodyPr>
+          <a:lstStyle/>
+          <a:p>
+            <a:pPr algn="l">
               <a:lnSpc>
                 <a:spcPts val="942"/>
               </a:lnSpc>
             </a:pPr>
             <a:r>
-              <a:rPr sz="650" b="1" spc="200">
+              <a:rPr sz="650" b="1" spc="220">
                 <a:solidFill>
-                  <a:srgbClr val="A3A9B5"/>
+                  <a:srgbClr val="12151C"/>
                 </a:solidFill>
                 <a:latin typeface="맑은 고딕"/>
                 <a:ea typeface="맑은 고딕"/>
